--- a/misc/welcome_to.pptx
+++ b/misc/welcome_to.pptx
@@ -115,7 +115,7 @@
 <file path=ppt/revisionInfo.xml><?xml version="1.0" encoding="utf-8"?>
 <p1510:revInfo xmlns:a="http://schemas.openxmlformats.org/drawingml/2006/main" xmlns:r="http://schemas.openxmlformats.org/officeDocument/2006/relationships" xmlns:p1510="http://schemas.microsoft.com/office/powerpoint/2015/10/main">
   <p1510:revLst>
-    <p1510:client id="{63814FE1-E8A5-4E73-BA76-8403A979A2D4}" v="1" dt="2025-04-22T11:32:51.892"/>
+    <p1510:client id="{A8D320DE-4198-4221-821D-543B47D85063}" v="1" dt="2026-04-28T12:04:26.823"/>
   </p1510:revLst>
 </p1510:revInfo>
 </file>
@@ -123,108 +123,20 @@
 <file path=ppt/changesInfos/changesInfo1.xml><?xml version="1.0" encoding="utf-8"?>
 <pc:chgInfo xmlns:a="http://schemas.openxmlformats.org/drawingml/2006/main" xmlns:r="http://schemas.openxmlformats.org/officeDocument/2006/relationships" xmlns:ac="http://schemas.microsoft.com/office/drawing/2013/main/command" xmlns:pc="http://schemas.microsoft.com/office/powerpoint/2013/main/command">
   <pc:docChgLst>
-    <pc:chgData name="Geert Jan Bex" userId="b602d378c858ceb4" providerId="LiveId" clId="{ECC9521B-78E0-4AC6-A540-A7E14CF28370}"/>
+    <pc:chgData name="Geert Jan Bex" userId="b602d378c858ceb4" providerId="LiveId" clId="{F3ED9F1C-8CBC-4187-814C-78BF1965CBEE}"/>
     <pc:docChg chg="custSel modSld">
-      <pc:chgData name="Geert Jan Bex" userId="b602d378c858ceb4" providerId="LiveId" clId="{ECC9521B-78E0-4AC6-A540-A7E14CF28370}" dt="2025-04-22T12:09:08.727" v="13" actId="20577"/>
+      <pc:chgData name="Geert Jan Bex" userId="b602d378c858ceb4" providerId="LiveId" clId="{F3ED9F1C-8CBC-4187-814C-78BF1965CBEE}" dt="2026-05-06T06:49:17.982" v="522" actId="20577"/>
       <pc:docMkLst>
         <pc:docMk/>
       </pc:docMkLst>
-      <pc:sldChg chg="modSp mod">
-        <pc:chgData name="Geert Jan Bex" userId="b602d378c858ceb4" providerId="LiveId" clId="{ECC9521B-78E0-4AC6-A540-A7E14CF28370}" dt="2025-04-22T12:09:08.727" v="13" actId="20577"/>
+      <pc:sldChg chg="delSp modSp mod">
+        <pc:chgData name="Geert Jan Bex" userId="b602d378c858ceb4" providerId="LiveId" clId="{F3ED9F1C-8CBC-4187-814C-78BF1965CBEE}" dt="2026-05-06T06:49:17.982" v="522" actId="20577"/>
         <pc:sldMkLst>
           <pc:docMk/>
           <pc:sldMk cId="2351393812" sldId="256"/>
         </pc:sldMkLst>
         <pc:spChg chg="mod">
-          <ac:chgData name="Geert Jan Bex" userId="b602d378c858ceb4" providerId="LiveId" clId="{ECC9521B-78E0-4AC6-A540-A7E14CF28370}" dt="2025-04-22T12:09:00.005" v="7" actId="20577"/>
-          <ac:spMkLst>
-            <pc:docMk/>
-            <pc:sldMk cId="2351393812" sldId="256"/>
-            <ac:spMk id="2" creationId="{7FFA7036-6173-4442-B630-210D9706CA67}"/>
-          </ac:spMkLst>
-        </pc:spChg>
-        <pc:spChg chg="mod">
-          <ac:chgData name="Geert Jan Bex" userId="b602d378c858ceb4" providerId="LiveId" clId="{ECC9521B-78E0-4AC6-A540-A7E14CF28370}" dt="2025-04-22T12:09:08.727" v="13" actId="20577"/>
-          <ac:spMkLst>
-            <pc:docMk/>
-            <pc:sldMk cId="2351393812" sldId="256"/>
-            <ac:spMk id="3" creationId="{6797D5F5-AD13-485D-85C0-7967B2222FDB}"/>
-          </ac:spMkLst>
-        </pc:spChg>
-      </pc:sldChg>
-    </pc:docChg>
-  </pc:docChgLst>
-  <pc:docChgLst>
-    <pc:chgData name="Geert Jan Bex" userId="b602d378c858ceb4" providerId="LiveId" clId="{63814FE1-E8A5-4E73-BA76-8403A979A2D4}"/>
-    <pc:docChg chg="modSld">
-      <pc:chgData name="Geert Jan Bex" userId="b602d378c858ceb4" providerId="LiveId" clId="{63814FE1-E8A5-4E73-BA76-8403A979A2D4}" dt="2025-04-22T11:32:59.440" v="4" actId="20577"/>
-      <pc:docMkLst>
-        <pc:docMk/>
-      </pc:docMkLst>
-      <pc:sldChg chg="modSp mod">
-        <pc:chgData name="Geert Jan Bex" userId="b602d378c858ceb4" providerId="LiveId" clId="{63814FE1-E8A5-4E73-BA76-8403A979A2D4}" dt="2025-04-22T11:32:59.440" v="4" actId="20577"/>
-        <pc:sldMkLst>
-          <pc:docMk/>
-          <pc:sldMk cId="2351393812" sldId="256"/>
-        </pc:sldMkLst>
-        <pc:spChg chg="mod">
-          <ac:chgData name="Geert Jan Bex" userId="b602d378c858ceb4" providerId="LiveId" clId="{63814FE1-E8A5-4E73-BA76-8403A979A2D4}" dt="2025-04-22T11:32:59.440" v="4" actId="20577"/>
-          <ac:spMkLst>
-            <pc:docMk/>
-            <pc:sldMk cId="2351393812" sldId="256"/>
-            <ac:spMk id="6" creationId="{57EDC76F-7000-E2FC-0150-24AD7C77D3CD}"/>
-          </ac:spMkLst>
-        </pc:spChg>
-      </pc:sldChg>
-    </pc:docChg>
-  </pc:docChgLst>
-  <pc:docChgLst>
-    <pc:chgData name="Geert Jan Bex" userId="b602d378c858ceb4" providerId="LiveId" clId="{742B2B3F-48E3-4961-8A8B-247C2BFC41DE}"/>
-    <pc:docChg chg="modSld">
-      <pc:chgData name="Geert Jan Bex" userId="b602d378c858ceb4" providerId="LiveId" clId="{742B2B3F-48E3-4961-8A8B-247C2BFC41DE}" dt="2024-10-09T06:50:13.374" v="37" actId="20577"/>
-      <pc:docMkLst>
-        <pc:docMk/>
-      </pc:docMkLst>
-      <pc:sldChg chg="modSp mod">
-        <pc:chgData name="Geert Jan Bex" userId="b602d378c858ceb4" providerId="LiveId" clId="{742B2B3F-48E3-4961-8A8B-247C2BFC41DE}" dt="2024-10-09T06:50:13.374" v="37" actId="20577"/>
-        <pc:sldMkLst>
-          <pc:docMk/>
-          <pc:sldMk cId="2351393812" sldId="256"/>
-        </pc:sldMkLst>
-      </pc:sldChg>
-    </pc:docChg>
-  </pc:docChgLst>
-  <pc:docChgLst>
-    <pc:chgData name="Geert Jan Bex" userId="b602d378c858ceb4" providerId="LiveId" clId="{9B987B8E-73CE-403B-AC2C-FADE261EECBE}"/>
-    <pc:docChg chg="custSel modSld">
-      <pc:chgData name="Geert Jan Bex" userId="b602d378c858ceb4" providerId="LiveId" clId="{9B987B8E-73CE-403B-AC2C-FADE261EECBE}" dt="2025-01-15T14:07:53.251" v="186" actId="20577"/>
-      <pc:docMkLst>
-        <pc:docMk/>
-      </pc:docMkLst>
-      <pc:sldChg chg="addSp delSp modSp mod">
-        <pc:chgData name="Geert Jan Bex" userId="b602d378c858ceb4" providerId="LiveId" clId="{9B987B8E-73CE-403B-AC2C-FADE261EECBE}" dt="2025-01-15T14:07:53.251" v="186" actId="20577"/>
-        <pc:sldMkLst>
-          <pc:docMk/>
-          <pc:sldMk cId="2351393812" sldId="256"/>
-        </pc:sldMkLst>
-      </pc:sldChg>
-    </pc:docChg>
-  </pc:docChgLst>
-  <pc:docChgLst>
-    <pc:chgData name="Geert Jan Bex" userId="b602d378c858ceb4" providerId="LiveId" clId="{CC892EBB-ACAA-428A-8A48-A5247DA99CCB}"/>
-    <pc:docChg chg="custSel modSld">
-      <pc:chgData name="Geert Jan Bex" userId="b602d378c858ceb4" providerId="LiveId" clId="{CC892EBB-ACAA-428A-8A48-A5247DA99CCB}" dt="2025-04-04T11:48:20.330" v="147" actId="20577"/>
-      <pc:docMkLst>
-        <pc:docMk/>
-      </pc:docMkLst>
-      <pc:sldChg chg="modSp mod">
-        <pc:chgData name="Geert Jan Bex" userId="b602d378c858ceb4" providerId="LiveId" clId="{CC892EBB-ACAA-428A-8A48-A5247DA99CCB}" dt="2025-04-04T11:48:20.330" v="147" actId="20577"/>
-        <pc:sldMkLst>
-          <pc:docMk/>
-          <pc:sldMk cId="2351393812" sldId="256"/>
-        </pc:sldMkLst>
-        <pc:spChg chg="mod">
-          <ac:chgData name="Geert Jan Bex" userId="b602d378c858ceb4" providerId="LiveId" clId="{CC892EBB-ACAA-428A-8A48-A5247DA99CCB}" dt="2025-04-04T11:48:20.330" v="147" actId="20577"/>
+          <ac:chgData name="Geert Jan Bex" userId="b602d378c858ceb4" providerId="LiveId" clId="{F3ED9F1C-8CBC-4187-814C-78BF1965CBEE}" dt="2026-05-06T06:49:17.982" v="522" actId="20577"/>
           <ac:spMkLst>
             <pc:docMk/>
             <pc:sldMk cId="2351393812" sldId="256"/>
@@ -384,7 +296,7 @@
           <a:p>
             <a:fld id="{9241B399-F7A9-45D1-B27B-105BE80270F6}" type="datetimeFigureOut">
               <a:rPr lang="en-US" smtClean="0"/>
-              <a:t>2025-04-22</a:t>
+              <a:t>2026-05-06</a:t>
             </a:fld>
             <a:endParaRPr lang="en-US"/>
           </a:p>
@@ -582,7 +494,7 @@
           <a:p>
             <a:fld id="{9241B399-F7A9-45D1-B27B-105BE80270F6}" type="datetimeFigureOut">
               <a:rPr lang="en-US" smtClean="0"/>
-              <a:t>2025-04-22</a:t>
+              <a:t>2026-05-06</a:t>
             </a:fld>
             <a:endParaRPr lang="en-US"/>
           </a:p>
@@ -790,7 +702,7 @@
           <a:p>
             <a:fld id="{9241B399-F7A9-45D1-B27B-105BE80270F6}" type="datetimeFigureOut">
               <a:rPr lang="en-US" smtClean="0"/>
-              <a:t>2025-04-22</a:t>
+              <a:t>2026-05-06</a:t>
             </a:fld>
             <a:endParaRPr lang="en-US"/>
           </a:p>
@@ -988,7 +900,7 @@
           <a:p>
             <a:fld id="{9241B399-F7A9-45D1-B27B-105BE80270F6}" type="datetimeFigureOut">
               <a:rPr lang="en-US" smtClean="0"/>
-              <a:t>2025-04-22</a:t>
+              <a:t>2026-05-06</a:t>
             </a:fld>
             <a:endParaRPr lang="en-US"/>
           </a:p>
@@ -1263,7 +1175,7 @@
           <a:p>
             <a:fld id="{9241B399-F7A9-45D1-B27B-105BE80270F6}" type="datetimeFigureOut">
               <a:rPr lang="en-US" smtClean="0"/>
-              <a:t>2025-04-22</a:t>
+              <a:t>2026-05-06</a:t>
             </a:fld>
             <a:endParaRPr lang="en-US"/>
           </a:p>
@@ -1528,7 +1440,7 @@
           <a:p>
             <a:fld id="{9241B399-F7A9-45D1-B27B-105BE80270F6}" type="datetimeFigureOut">
               <a:rPr lang="en-US" smtClean="0"/>
-              <a:t>2025-04-22</a:t>
+              <a:t>2026-05-06</a:t>
             </a:fld>
             <a:endParaRPr lang="en-US"/>
           </a:p>
@@ -1940,7 +1852,7 @@
           <a:p>
             <a:fld id="{9241B399-F7A9-45D1-B27B-105BE80270F6}" type="datetimeFigureOut">
               <a:rPr lang="en-US" smtClean="0"/>
-              <a:t>2025-04-22</a:t>
+              <a:t>2026-05-06</a:t>
             </a:fld>
             <a:endParaRPr lang="en-US"/>
           </a:p>
@@ -2081,7 +1993,7 @@
           <a:p>
             <a:fld id="{9241B399-F7A9-45D1-B27B-105BE80270F6}" type="datetimeFigureOut">
               <a:rPr lang="en-US" smtClean="0"/>
-              <a:t>2025-04-22</a:t>
+              <a:t>2026-05-06</a:t>
             </a:fld>
             <a:endParaRPr lang="en-US"/>
           </a:p>
@@ -2194,7 +2106,7 @@
           <a:p>
             <a:fld id="{9241B399-F7A9-45D1-B27B-105BE80270F6}" type="datetimeFigureOut">
               <a:rPr lang="en-US" smtClean="0"/>
-              <a:t>2025-04-22</a:t>
+              <a:t>2026-05-06</a:t>
             </a:fld>
             <a:endParaRPr lang="en-US"/>
           </a:p>
@@ -2505,7 +2417,7 @@
           <a:p>
             <a:fld id="{9241B399-F7A9-45D1-B27B-105BE80270F6}" type="datetimeFigureOut">
               <a:rPr lang="en-US" smtClean="0"/>
-              <a:t>2025-04-22</a:t>
+              <a:t>2026-05-06</a:t>
             </a:fld>
             <a:endParaRPr lang="en-US"/>
           </a:p>
@@ -2793,7 +2705,7 @@
           <a:p>
             <a:fld id="{9241B399-F7A9-45D1-B27B-105BE80270F6}" type="datetimeFigureOut">
               <a:rPr lang="en-US" smtClean="0"/>
-              <a:t>2025-04-22</a:t>
+              <a:t>2026-05-06</a:t>
             </a:fld>
             <a:endParaRPr lang="en-US"/>
           </a:p>
@@ -3034,7 +2946,7 @@
           <a:p>
             <a:fld id="{9241B399-F7A9-45D1-B27B-105BE80270F6}" type="datetimeFigureOut">
               <a:rPr lang="en-US" smtClean="0"/>
-              <a:t>2025-04-22</a:t>
+              <a:t>2026-05-06</a:t>
             </a:fld>
             <a:endParaRPr lang="en-US"/>
           </a:p>
@@ -3467,10 +3379,15 @@
             <p:ph type="ctrTitle"/>
           </p:nvPr>
         </p:nvSpPr>
-        <p:spPr/>
+        <p:spPr>
+          <a:xfrm>
+            <a:off x="1524000" y="1475657"/>
+            <a:ext cx="9144000" cy="2387600"/>
+          </a:xfrm>
+        </p:spPr>
         <p:txBody>
           <a:bodyPr>
-            <a:normAutofit/>
+            <a:normAutofit fontScale="90000"/>
           </a:bodyPr>
           <a:lstStyle/>
           <a:p>
@@ -3483,8 +3400,13 @@
             </a:br>
             <a:r>
               <a:rPr lang="en-US" dirty="0"/>
-              <a:t>&lt;title&gt;</a:t>
-            </a:r>
+              <a:t>Heterogeneous programming with </a:t>
+            </a:r>
+            <a:r>
+              <a:rPr lang="en-US" dirty="0" err="1"/>
+              <a:t>Kokkos</a:t>
+            </a:r>
+            <a:endParaRPr lang="en-US" dirty="0"/>
           </a:p>
         </p:txBody>
       </p:sp>
@@ -3518,15 +3440,7 @@
           <a:p>
             <a:r>
               <a:rPr lang="en-US" dirty="0"/>
-              <a:t>We will start at </a:t>
-            </a:r>
-            <a:r>
-              <a:rPr lang="en-US"/>
-              <a:t>&lt;hour&gt; </a:t>
-            </a:r>
-            <a:r>
-              <a:rPr lang="en-US" dirty="0"/>
-              <a:t>CET</a:t>
+              <a:t>We will start at 9h00 CEST</a:t>
             </a:r>
           </a:p>
           <a:p>
@@ -3549,87 +3463,6 @@
           </a:p>
         </p:txBody>
       </p:sp>
-      <p:pic>
-        <p:nvPicPr>
-          <p:cNvPr id="4" name="Picture 3">
-            <a:extLst>
-              <a:ext uri="{FF2B5EF4-FFF2-40B4-BE49-F238E27FC236}">
-                <a16:creationId xmlns:a16="http://schemas.microsoft.com/office/drawing/2014/main" id="{F8007167-C66F-4A1D-ADC7-37550CEA9B48}"/>
-              </a:ext>
-            </a:extLst>
-          </p:cNvPr>
-          <p:cNvPicPr>
-            <a:picLocks noChangeAspect="1"/>
-          </p:cNvPicPr>
-          <p:nvPr/>
-        </p:nvPicPr>
-        <p:blipFill>
-          <a:blip r:embed="rId2">
-            <a:extLst>
-              <a:ext uri="{28A0092B-C50C-407E-A947-70E740481C1C}">
-                <a14:useLocalDpi xmlns:a14="http://schemas.microsoft.com/office/drawing/2010/main" val="0"/>
-              </a:ext>
-            </a:extLst>
-          </a:blip>
-          <a:stretch>
-            <a:fillRect/>
-          </a:stretch>
-        </p:blipFill>
-        <p:spPr>
-          <a:xfrm>
-            <a:off x="987224" y="1046566"/>
-            <a:ext cx="2085975" cy="352425"/>
-          </a:xfrm>
-          <a:prstGeom prst="rect">
-            <a:avLst/>
-          </a:prstGeom>
-        </p:spPr>
-      </p:pic>
-      <p:pic>
-        <p:nvPicPr>
-          <p:cNvPr id="5" name="Picture 4">
-            <a:extLst>
-              <a:ext uri="{FF2B5EF4-FFF2-40B4-BE49-F238E27FC236}">
-                <a16:creationId xmlns:a16="http://schemas.microsoft.com/office/drawing/2014/main" id="{17413B35-E7F3-41BF-AD23-EE5E09FD5949}"/>
-              </a:ext>
-            </a:extLst>
-          </p:cNvPr>
-          <p:cNvPicPr>
-            <a:picLocks noChangeAspect="1" noChangeArrowheads="1"/>
-          </p:cNvPicPr>
-          <p:nvPr/>
-        </p:nvPicPr>
-        <p:blipFill rotWithShape="1">
-          <a:blip r:embed="rId3" cstate="print">
-            <a:extLst>
-              <a:ext uri="{28A0092B-C50C-407E-A947-70E740481C1C}">
-                <a14:useLocalDpi xmlns:a14="http://schemas.microsoft.com/office/drawing/2010/main" val="0"/>
-              </a:ext>
-            </a:extLst>
-          </a:blip>
-          <a:srcRect b="16829"/>
-          <a:stretch/>
-        </p:blipFill>
-        <p:spPr bwMode="auto">
-          <a:xfrm>
-            <a:off x="9366472" y="511430"/>
-            <a:ext cx="1534493" cy="1422699"/>
-          </a:xfrm>
-          <a:prstGeom prst="rect">
-            <a:avLst/>
-          </a:prstGeom>
-          <a:noFill/>
-          <a:extLst>
-            <a:ext uri="{909E8E84-426E-40DD-AFC4-6F175D3DCCD1}">
-              <a14:hiddenFill xmlns:a14="http://schemas.microsoft.com/office/drawing/2010/main">
-                <a:solidFill>
-                  <a:srgbClr val="FFFFFF"/>
-                </a:solidFill>
-              </a14:hiddenFill>
-            </a:ext>
-          </a:extLst>
-        </p:spPr>
-      </p:pic>
       <p:sp>
         <p:nvSpPr>
           <p:cNvPr id="6" name="TextBox 5">
@@ -3666,7 +3499,7 @@
           <a:p>
             <a:r>
               <a:rPr lang="en-US" sz="2000" dirty="0">
-                <a:hlinkClick r:id="rId4"/>
+                <a:hlinkClick r:id="rId2"/>
               </a:rPr>
               <a:t>https://gjbex.github.io/Training-sessions/code_of_conduct/</a:t>
             </a:r>
@@ -3678,6 +3511,42 @@
           </a:p>
         </p:txBody>
       </p:sp>
+      <p:pic>
+        <p:nvPicPr>
+          <p:cNvPr id="7" name="Picture 6" descr="A black text on an orange background&#10;&#10;AI-generated content may be incorrect.">
+            <a:extLst>
+              <a:ext uri="{FF2B5EF4-FFF2-40B4-BE49-F238E27FC236}">
+                <a16:creationId xmlns:a16="http://schemas.microsoft.com/office/drawing/2014/main" id="{E3124D6B-4622-B0CA-F15D-DC4560D2002C}"/>
+              </a:ext>
+            </a:extLst>
+          </p:cNvPr>
+          <p:cNvPicPr>
+            <a:picLocks noChangeAspect="1"/>
+          </p:cNvPicPr>
+          <p:nvPr/>
+        </p:nvPicPr>
+        <p:blipFill>
+          <a:blip r:embed="rId3">
+            <a:extLst>
+              <a:ext uri="{28A0092B-C50C-407E-A947-70E740481C1C}">
+                <a14:useLocalDpi xmlns:a14="http://schemas.microsoft.com/office/drawing/2010/main" val="0"/>
+              </a:ext>
+            </a:extLst>
+          </a:blip>
+          <a:stretch>
+            <a:fillRect/>
+          </a:stretch>
+        </p:blipFill>
+        <p:spPr>
+          <a:xfrm>
+            <a:off x="257891" y="511430"/>
+            <a:ext cx="3946238" cy="1531633"/>
+          </a:xfrm>
+          <a:prstGeom prst="rect">
+            <a:avLst/>
+          </a:prstGeom>
+        </p:spPr>
+      </p:pic>
     </p:spTree>
     <p:extLst>
       <p:ext uri="{BB962C8B-B14F-4D97-AF65-F5344CB8AC3E}">
